--- a/재정학/01_Lectures/재정학_Chapter_7.pptx
+++ b/재정학/01_Lectures/재정학_Chapter_7.pptx
@@ -17,8 +17,8 @@
     <p:sldId id="690" r:id="rId8"/>
     <p:sldId id="691" r:id="rId9"/>
     <p:sldId id="692" r:id="rId10"/>
-    <p:sldId id="693" r:id="rId11"/>
-    <p:sldId id="694" r:id="rId12"/>
+    <p:sldId id="694" r:id="rId11"/>
+    <p:sldId id="693" r:id="rId12"/>
     <p:sldId id="695" r:id="rId13"/>
     <p:sldId id="696" r:id="rId14"/>
     <p:sldId id="632" r:id="rId15"/>
@@ -258,7 +258,7 @@
           <a:p>
             <a:fld id="{4A5E00EF-AEA4-43E2-9451-8F9C59A39471}" type="datetimeFigureOut">
               <a:rPr lang="ko-KR" altLang="en-US" smtClean="0"/>
-              <a:t>2026-03-12</a:t>
+              <a:t>2026-05-06</a:t>
             </a:fld>
             <a:endParaRPr lang="ko-KR" altLang="en-US"/>
           </a:p>
@@ -680,7 +680,7 @@
           <a:p>
             <a:fld id="{CD32C56F-BD27-4999-9E6D-D4EACE3DA9F4}" type="datetime1">
               <a:rPr lang="ko-KR" altLang="en-US" smtClean="0"/>
-              <a:t>2026-03-12</a:t>
+              <a:t>2026-05-06</a:t>
             </a:fld>
             <a:endParaRPr lang="ko-KR" altLang="en-US"/>
           </a:p>
@@ -894,7 +894,7 @@
           <a:p>
             <a:fld id="{8EF4A19C-72C8-45CA-8E3F-68A7FA345D6C}" type="datetime1">
               <a:rPr lang="ko-KR" altLang="en-US" smtClean="0"/>
-              <a:t>2026-03-12</a:t>
+              <a:t>2026-05-06</a:t>
             </a:fld>
             <a:endParaRPr lang="ko-KR" altLang="en-US"/>
           </a:p>
@@ -1118,7 +1118,7 @@
           <a:p>
             <a:fld id="{56A175B2-010B-4341-954C-5F8F5C70B124}" type="datetime1">
               <a:rPr lang="ko-KR" altLang="en-US" smtClean="0"/>
-              <a:t>2026-03-12</a:t>
+              <a:t>2026-05-06</a:t>
             </a:fld>
             <a:endParaRPr lang="ko-KR" altLang="en-US"/>
           </a:p>
@@ -1332,7 +1332,7 @@
           <a:p>
             <a:fld id="{16B83F9E-22C9-45CA-9E85-070F1D3EF530}" type="datetime1">
               <a:rPr lang="ko-KR" altLang="en-US" smtClean="0"/>
-              <a:t>2026-03-12</a:t>
+              <a:t>2026-05-06</a:t>
             </a:fld>
             <a:endParaRPr lang="ko-KR" altLang="en-US"/>
           </a:p>
@@ -1623,7 +1623,7 @@
           <a:p>
             <a:fld id="{03278F45-FB3C-4C4D-B89A-7BC3F5F229F6}" type="datetime1">
               <a:rPr lang="ko-KR" altLang="en-US" smtClean="0"/>
-              <a:t>2026-03-12</a:t>
+              <a:t>2026-05-06</a:t>
             </a:fld>
             <a:endParaRPr lang="ko-KR" altLang="en-US"/>
           </a:p>
@@ -2016,7 +2016,7 @@
           <a:p>
             <a:fld id="{38FDAC3C-35A6-415C-9F03-738A6AC328B1}" type="datetime1">
               <a:rPr lang="ko-KR" altLang="en-US" smtClean="0"/>
-              <a:t>2026-03-12</a:t>
+              <a:t>2026-05-06</a:t>
             </a:fld>
             <a:endParaRPr lang="ko-KR" altLang="en-US"/>
           </a:p>
@@ -3610,7 +3610,7 @@
           <a:p>
             <a:fld id="{507A0DF1-AEE6-4B0D-89D2-351E7B3EF65C}" type="datetime1">
               <a:rPr lang="ko-KR" altLang="en-US" smtClean="0"/>
-              <a:t>2026-03-12</a:t>
+              <a:t>2026-05-06</a:t>
             </a:fld>
             <a:endParaRPr lang="ko-KR" altLang="en-US"/>
           </a:p>
@@ -4038,7 +4038,7 @@
           <a:p>
             <a:fld id="{CA93B8C9-630F-4D57-944D-04FD37CECCD3}" type="datetime1">
               <a:rPr lang="ko-KR" altLang="en-US" smtClean="0"/>
-              <a:t>2026-03-12</a:t>
+              <a:t>2026-05-06</a:t>
             </a:fld>
             <a:endParaRPr lang="ko-KR" altLang="en-US"/>
           </a:p>
@@ -4195,7 +4195,7 @@
           <a:p>
             <a:fld id="{E986165A-AC43-4902-9541-874ECD310BA3}" type="datetime1">
               <a:rPr lang="ko-KR" altLang="en-US" smtClean="0"/>
-              <a:t>2026-03-12</a:t>
+              <a:t>2026-05-06</a:t>
             </a:fld>
             <a:endParaRPr lang="ko-KR" altLang="en-US"/>
           </a:p>
@@ -4522,7 +4522,7 @@
           <a:p>
             <a:fld id="{47E6EE6D-2B0E-43A9-87A2-7354CDB998F4}" type="datetime1">
               <a:rPr lang="ko-KR" altLang="en-US" smtClean="0"/>
-              <a:t>2026-03-12</a:t>
+              <a:t>2026-05-06</a:t>
             </a:fld>
             <a:endParaRPr lang="ko-KR" altLang="en-US"/>
           </a:p>
@@ -4826,7 +4826,7 @@
           <a:p>
             <a:fld id="{5CC5944E-0BC8-4FAA-9F94-6B4B05834E10}" type="datetime1">
               <a:rPr lang="ko-KR" altLang="en-US" smtClean="0"/>
-              <a:t>2026-03-12</a:t>
+              <a:t>2026-05-06</a:t>
             </a:fld>
             <a:endParaRPr lang="ko-KR" altLang="en-US"/>
           </a:p>
@@ -7260,6 +7260,462 @@
         <p:cNvPr id="1" name="">
           <a:extLst>
             <a:ext uri="{FF2B5EF4-FFF2-40B4-BE49-F238E27FC236}">
+              <a16:creationId xmlns:a16="http://schemas.microsoft.com/office/drawing/2014/main" id="{43125B29-611F-999C-1E55-354A8BEFE732}"/>
+            </a:ext>
+          </a:extLst>
+        </p:cNvPr>
+        <p:cNvGrpSpPr/>
+        <p:nvPr/>
+      </p:nvGrpSpPr>
+      <p:grpSpPr>
+        <a:xfrm>
+          <a:off x="0" y="0"/>
+          <a:ext cx="0" cy="0"/>
+          <a:chOff x="0" y="0"/>
+          <a:chExt cx="0" cy="0"/>
+        </a:xfrm>
+      </p:grpSpPr>
+      <p:sp>
+        <p:nvSpPr>
+          <p:cNvPr id="2" name="제목 1">
+            <a:extLst>
+              <a:ext uri="{FF2B5EF4-FFF2-40B4-BE49-F238E27FC236}">
+                <a16:creationId xmlns:a16="http://schemas.microsoft.com/office/drawing/2014/main" id="{2DE4F974-FAB6-D464-06A6-F925D2123293}"/>
+              </a:ext>
+            </a:extLst>
+          </p:cNvPr>
+          <p:cNvSpPr>
+            <a:spLocks noGrp="1"/>
+          </p:cNvSpPr>
+          <p:nvPr>
+            <p:ph type="title"/>
+          </p:nvPr>
+        </p:nvSpPr>
+        <p:spPr/>
+        <p:txBody>
+          <a:bodyPr/>
+          <a:lstStyle/>
+          <a:p>
+            <a:r>
+              <a:rPr lang="ko-KR" altLang="en-US" dirty="0"/>
+              <a:t>조건부평가법을 둘러싼 논쟁</a:t>
+            </a:r>
+          </a:p>
+        </p:txBody>
+      </p:sp>
+      <p:sp>
+        <p:nvSpPr>
+          <p:cNvPr id="4" name="슬라이드 번호 개체 틀 3">
+            <a:extLst>
+              <a:ext uri="{FF2B5EF4-FFF2-40B4-BE49-F238E27FC236}">
+                <a16:creationId xmlns:a16="http://schemas.microsoft.com/office/drawing/2014/main" id="{C19BE421-0D30-5FDC-93EE-E737A51CBE1D}"/>
+              </a:ext>
+            </a:extLst>
+          </p:cNvPr>
+          <p:cNvSpPr>
+            <a:spLocks noGrp="1"/>
+          </p:cNvSpPr>
+          <p:nvPr>
+            <p:ph type="sldNum" sz="quarter" idx="12"/>
+          </p:nvPr>
+        </p:nvSpPr>
+        <p:spPr/>
+        <p:txBody>
+          <a:bodyPr/>
+          <a:lstStyle/>
+          <a:p>
+            <a:fld id="{109C872D-39A9-4065-8BF3-6A613116E2A1}" type="slidenum">
+              <a:rPr lang="ko-KR" altLang="en-US" smtClean="0"/>
+              <a:t>10</a:t>
+            </a:fld>
+            <a:endParaRPr lang="ko-KR" altLang="en-US"/>
+          </a:p>
+        </p:txBody>
+      </p:sp>
+      <p:sp>
+        <p:nvSpPr>
+          <p:cNvPr id="5" name="TextBox 4">
+            <a:extLst>
+              <a:ext uri="{FF2B5EF4-FFF2-40B4-BE49-F238E27FC236}">
+                <a16:creationId xmlns:a16="http://schemas.microsoft.com/office/drawing/2014/main" id="{5EDBDAE9-01AB-96C8-99F2-1DA74C052C6C}"/>
+              </a:ext>
+            </a:extLst>
+          </p:cNvPr>
+          <p:cNvSpPr txBox="1"/>
+          <p:nvPr/>
+        </p:nvSpPr>
+        <p:spPr>
+          <a:xfrm>
+            <a:off x="288790" y="958844"/>
+            <a:ext cx="11250267" cy="5215338"/>
+          </a:xfrm>
+          <a:prstGeom prst="rect">
+            <a:avLst/>
+          </a:prstGeom>
+          <a:noFill/>
+        </p:spPr>
+        <p:txBody>
+          <a:bodyPr wrap="square" rtlCol="0" anchor="t">
+            <a:spAutoFit/>
+          </a:bodyPr>
+          <a:lstStyle/>
+          <a:p>
+            <a:pPr marL="377825" indent="-285750">
+              <a:lnSpc>
+                <a:spcPct val="150000"/>
+              </a:lnSpc>
+              <a:buFont typeface="Arial" panose="020B0604020202020204" pitchFamily="34" charset="0"/>
+              <a:buChar char="•"/>
+            </a:pPr>
+            <a:r>
+              <a:rPr lang="ko-KR" altLang="en-US" sz="1600" spc="-50" dirty="0"/>
+              <a:t>조건부평가법이 설문조사 방법이 갖는 일반적인 문제에서 자유롭지 못하다</a:t>
+            </a:r>
+            <a:r>
+              <a:rPr lang="en-US" altLang="ko-KR" sz="1600" spc="-50" dirty="0"/>
+              <a:t>.</a:t>
+            </a:r>
+          </a:p>
+          <a:p>
+            <a:pPr marL="835025" lvl="1" indent="-285750">
+              <a:lnSpc>
+                <a:spcPct val="150000"/>
+              </a:lnSpc>
+              <a:buFont typeface="Wingdings" panose="05000000000000000000" pitchFamily="2" charset="2"/>
+              <a:buChar char="ü"/>
+            </a:pPr>
+            <a:r>
+              <a:rPr lang="ko-KR" altLang="en-US" sz="1600" spc="-50" dirty="0"/>
+              <a:t>설문조사의 경우</a:t>
+            </a:r>
+            <a:r>
+              <a:rPr lang="en-US" altLang="ko-KR" sz="1600" spc="-50" dirty="0"/>
+              <a:t>, </a:t>
+            </a:r>
+            <a:r>
+              <a:rPr lang="ko-KR" altLang="en-US" sz="1600" spc="-50" dirty="0"/>
+              <a:t>질문의 표현과 순서를 조금만 바꾸어도 응답의 내용이 크게 달라지는 일이 발생하는데</a:t>
+            </a:r>
+            <a:r>
+              <a:rPr lang="en-US" altLang="ko-KR" sz="1600" spc="-50" dirty="0"/>
+              <a:t>, </a:t>
+            </a:r>
+            <a:r>
+              <a:rPr lang="ko-KR" altLang="en-US" sz="1600" spc="-50" dirty="0"/>
+              <a:t>이를 응답효과라고 부르며</a:t>
+            </a:r>
+            <a:r>
+              <a:rPr lang="en-US" altLang="ko-KR" sz="1600" spc="-50" dirty="0"/>
+              <a:t> </a:t>
+            </a:r>
+            <a:r>
+              <a:rPr lang="ko-KR" altLang="en-US" sz="1600" spc="-50" dirty="0"/>
+              <a:t>설문조사 결과의 신빙성을 떨어뜨리는 역할을 한다</a:t>
+            </a:r>
+            <a:r>
+              <a:rPr lang="en-US" altLang="ko-KR" sz="1600" spc="-50" dirty="0"/>
+              <a:t>.</a:t>
+            </a:r>
+          </a:p>
+          <a:p>
+            <a:pPr marL="835025" lvl="1" indent="-285750">
+              <a:lnSpc>
+                <a:spcPct val="150000"/>
+              </a:lnSpc>
+              <a:buFont typeface="Wingdings" panose="05000000000000000000" pitchFamily="2" charset="2"/>
+              <a:buChar char="ü"/>
+            </a:pPr>
+            <a:r>
+              <a:rPr lang="ko-KR" altLang="en-US" sz="1600" spc="-50" dirty="0"/>
+              <a:t>또한 평소 환경에 대해 별 생각이 없던 사람에게 환경의 가치를 묻고</a:t>
+            </a:r>
+            <a:r>
+              <a:rPr lang="en-US" altLang="ko-KR" sz="1600" spc="-50" dirty="0"/>
+              <a:t>, </a:t>
+            </a:r>
+            <a:r>
+              <a:rPr lang="ko-KR" altLang="en-US" sz="1600" spc="-50" dirty="0"/>
+              <a:t>대답한 것이 믿을 만한지에 대해서도 의문이다</a:t>
+            </a:r>
+            <a:r>
+              <a:rPr lang="en-US" altLang="ko-KR" sz="1600" spc="-50" dirty="0"/>
+              <a:t>.</a:t>
+            </a:r>
+          </a:p>
+          <a:p>
+            <a:pPr marL="377825" indent="-285750">
+              <a:lnSpc>
+                <a:spcPct val="150000"/>
+              </a:lnSpc>
+              <a:buFont typeface="Arial" panose="020B0604020202020204" pitchFamily="34" charset="0"/>
+              <a:buChar char="•"/>
+            </a:pPr>
+            <a:r>
+              <a:rPr lang="ko-KR" altLang="en-US" sz="1600" spc="-50" dirty="0"/>
+              <a:t>설문조사가 갖는 문제점 뿐만 아니라 경제이론의 관점에서도 조건부평가법이 부적절하다고 평가를 하기도 한다</a:t>
+            </a:r>
+            <a:r>
+              <a:rPr lang="en-US" altLang="ko-KR" sz="1600" spc="-50" dirty="0"/>
+              <a:t>.</a:t>
+            </a:r>
+          </a:p>
+          <a:p>
+            <a:pPr marL="835025" lvl="1" indent="-285750">
+              <a:lnSpc>
+                <a:spcPct val="150000"/>
+              </a:lnSpc>
+              <a:buFont typeface="Wingdings" panose="05000000000000000000" pitchFamily="2" charset="2"/>
+              <a:buChar char="ü"/>
+            </a:pPr>
+            <a:r>
+              <a:rPr lang="ko-KR" altLang="en-US" sz="1600" dirty="0"/>
+              <a:t>다이아몬드</a:t>
+            </a:r>
+            <a:r>
+              <a:rPr lang="en-US" altLang="ko-KR" sz="1600" dirty="0"/>
+              <a:t>-</a:t>
+            </a:r>
+            <a:r>
+              <a:rPr lang="ko-KR" altLang="en-US" sz="1600" dirty="0" err="1"/>
+              <a:t>하우즈먼은</a:t>
+            </a:r>
+            <a:r>
+              <a:rPr lang="ko-KR" altLang="en-US" sz="1600" dirty="0"/>
+              <a:t> 조건부평가법이 환경의 가치를 과대평가하는 결과를 가져올 수 있다고 얘기한다</a:t>
+            </a:r>
+            <a:r>
+              <a:rPr lang="en-US" altLang="ko-KR" sz="1600" dirty="0"/>
+              <a:t>.</a:t>
+            </a:r>
+          </a:p>
+          <a:p>
+            <a:pPr marL="1292225" lvl="2" indent="-285750">
+              <a:lnSpc>
+                <a:spcPct val="150000"/>
+              </a:lnSpc>
+              <a:buFont typeface="Wingdings" panose="05000000000000000000" pitchFamily="2" charset="2"/>
+              <a:buChar char="Ø"/>
+            </a:pPr>
+            <a:r>
+              <a:rPr lang="ko-KR" altLang="en-US" sz="1600" dirty="0"/>
+              <a:t>설문 응답자들은 자기 자신뿐 아니라 남들이 얻을 환경 혜택까지 감안하여 대답할 가능성이 있다는 것이다</a:t>
+            </a:r>
+            <a:r>
+              <a:rPr lang="en-US" altLang="ko-KR" sz="1600" dirty="0"/>
+              <a:t>.</a:t>
+            </a:r>
+          </a:p>
+          <a:p>
+            <a:pPr marL="835025" lvl="1" indent="-285750">
+              <a:lnSpc>
+                <a:spcPct val="150000"/>
+              </a:lnSpc>
+              <a:buFont typeface="Wingdings" panose="05000000000000000000" pitchFamily="2" charset="2"/>
+              <a:buChar char="ü"/>
+            </a:pPr>
+            <a:r>
+              <a:rPr lang="ko-KR" altLang="en-US" sz="1600" dirty="0"/>
+              <a:t>행태경제학자들은 어떤 물건을 보유하고 </a:t>
+            </a:r>
+            <a:r>
+              <a:rPr lang="ko-KR" altLang="en-US" sz="1600" dirty="0" err="1"/>
+              <a:t>있는지의</a:t>
+            </a:r>
+            <a:r>
+              <a:rPr lang="ko-KR" altLang="en-US" sz="1600" dirty="0"/>
+              <a:t> 여부가 그것의 가치 평가에 영향을 준다고 주장한다</a:t>
+            </a:r>
+            <a:r>
+              <a:rPr lang="en-US" altLang="ko-KR" sz="1600" dirty="0"/>
+              <a:t>.</a:t>
+            </a:r>
+          </a:p>
+          <a:p>
+            <a:pPr marL="1292225" lvl="2" indent="-285750">
+              <a:lnSpc>
+                <a:spcPct val="150000"/>
+              </a:lnSpc>
+              <a:buFont typeface="Wingdings" panose="05000000000000000000" pitchFamily="2" charset="2"/>
+              <a:buChar char="Ø"/>
+            </a:pPr>
+            <a:r>
+              <a:rPr lang="ko-KR" altLang="en-US" sz="1600" dirty="0"/>
+              <a:t>어떤 재화의 소유자가 남에게 넘기려면 최소한으로 받을 수 있는 금액이 </a:t>
+            </a:r>
+            <a:r>
+              <a:rPr lang="en-US" altLang="ko-KR" sz="1600" dirty="0"/>
+              <a:t>‘</a:t>
+            </a:r>
+            <a:r>
+              <a:rPr lang="ko-KR" altLang="en-US" sz="1600" dirty="0"/>
+              <a:t>수용의사가 있는 금액</a:t>
+            </a:r>
+            <a:r>
+              <a:rPr lang="en-US" altLang="ko-KR" sz="1600" dirty="0"/>
+              <a:t>’ (Willingness To Accept, WTA)</a:t>
+            </a:r>
+            <a:r>
+              <a:rPr lang="ko-KR" altLang="en-US" sz="1600" dirty="0"/>
+              <a:t>이고</a:t>
+            </a:r>
+            <a:r>
+              <a:rPr lang="en-US" altLang="ko-KR" sz="1600" dirty="0"/>
+              <a:t>, </a:t>
+            </a:r>
+            <a:r>
+              <a:rPr lang="ko-KR" altLang="en-US" sz="1600" dirty="0"/>
+              <a:t>또 다른 어떤 사람이 그것을 얻기 위해 지불할 금액을 </a:t>
+            </a:r>
+            <a:r>
+              <a:rPr lang="en-US" altLang="ko-KR" sz="1600" dirty="0"/>
+              <a:t>‘</a:t>
+            </a:r>
+            <a:r>
+              <a:rPr lang="ko-KR" altLang="en-US" sz="1600" dirty="0"/>
+              <a:t>지불의사가 있는 금액</a:t>
+            </a:r>
+            <a:r>
+              <a:rPr lang="en-US" altLang="ko-KR" sz="1600" dirty="0"/>
+              <a:t>’ (Willingness To Pay, WTP)</a:t>
+            </a:r>
+            <a:r>
+              <a:rPr lang="ko-KR" altLang="en-US" sz="1600" dirty="0"/>
+              <a:t>이다</a:t>
+            </a:r>
+            <a:r>
+              <a:rPr lang="en-US" altLang="ko-KR" sz="1600" dirty="0"/>
+              <a:t>.</a:t>
+            </a:r>
+          </a:p>
+          <a:p>
+            <a:pPr marL="1292225" lvl="2" indent="-285750">
+              <a:lnSpc>
+                <a:spcPct val="150000"/>
+              </a:lnSpc>
+              <a:buFont typeface="Wingdings" panose="05000000000000000000" pitchFamily="2" charset="2"/>
+              <a:buChar char="Ø"/>
+            </a:pPr>
+            <a:r>
+              <a:rPr lang="ko-KR" altLang="en-US" sz="1600" dirty="0"/>
+              <a:t>일반적으로 </a:t>
+            </a:r>
+            <a:r>
+              <a:rPr lang="en-US" altLang="ko-KR" sz="1600" dirty="0"/>
+              <a:t>‘</a:t>
+            </a:r>
+            <a:r>
+              <a:rPr lang="ko-KR" altLang="en-US" sz="1600" dirty="0"/>
+              <a:t>수용의사 금액</a:t>
+            </a:r>
+            <a:r>
+              <a:rPr lang="en-US" altLang="ko-KR" sz="1600" dirty="0"/>
+              <a:t>(WTA)’</a:t>
+            </a:r>
+            <a:r>
+              <a:rPr lang="ko-KR" altLang="en-US" sz="1600" dirty="0"/>
+              <a:t> </a:t>
+            </a:r>
+            <a:r>
+              <a:rPr lang="en-US" altLang="ko-KR" sz="1600" dirty="0"/>
+              <a:t>&gt;</a:t>
+            </a:r>
+            <a:r>
+              <a:rPr lang="ko-KR" altLang="en-US" sz="1600" dirty="0"/>
+              <a:t> </a:t>
+            </a:r>
+            <a:r>
+              <a:rPr lang="en-US" altLang="ko-KR" sz="1600" dirty="0"/>
+              <a:t>‘</a:t>
+            </a:r>
+            <a:r>
+              <a:rPr lang="ko-KR" altLang="en-US" sz="1600" dirty="0"/>
+              <a:t>지불의사 금액</a:t>
+            </a:r>
+            <a:r>
+              <a:rPr lang="en-US" altLang="ko-KR" sz="1600" dirty="0"/>
+              <a:t>(WTP)‘ </a:t>
+            </a:r>
+            <a:r>
+              <a:rPr lang="ko-KR" altLang="en-US" sz="1600" dirty="0"/>
+              <a:t>관계가 나타나는데</a:t>
+            </a:r>
+            <a:r>
+              <a:rPr lang="en-US" altLang="ko-KR" sz="1600" dirty="0"/>
+              <a:t>, </a:t>
+            </a:r>
+            <a:r>
+              <a:rPr lang="ko-KR" altLang="en-US" sz="1600" dirty="0"/>
+              <a:t>행태경제학자에 따르면 부존효과 때문이 이런 결과가 나타난다고 한다</a:t>
+            </a:r>
+            <a:r>
+              <a:rPr lang="en-US" altLang="ko-KR" sz="1600" dirty="0"/>
+              <a:t>.</a:t>
+            </a:r>
+          </a:p>
+          <a:p>
+            <a:pPr marL="1292225" lvl="2" indent="-285750">
+              <a:lnSpc>
+                <a:spcPct val="150000"/>
+              </a:lnSpc>
+              <a:buFont typeface="Wingdings" panose="05000000000000000000" pitchFamily="2" charset="2"/>
+              <a:buChar char="Ø"/>
+            </a:pPr>
+            <a:r>
+              <a:rPr lang="ko-KR" altLang="en-US" sz="1600" dirty="0"/>
+              <a:t>이런 부존효과는 사람들에게 </a:t>
+            </a:r>
+            <a:r>
+              <a:rPr lang="en-US" altLang="ko-KR" sz="1600" dirty="0"/>
+              <a:t>WTA</a:t>
+            </a:r>
+            <a:r>
+              <a:rPr lang="ko-KR" altLang="en-US" sz="1600" dirty="0"/>
+              <a:t>와 </a:t>
+            </a:r>
+            <a:r>
+              <a:rPr lang="en-US" altLang="ko-KR" sz="1600" dirty="0"/>
+              <a:t>WTP </a:t>
+            </a:r>
+            <a:r>
+              <a:rPr lang="ko-KR" altLang="en-US" sz="1600" dirty="0"/>
+              <a:t>둘 중 어떤 방식으로 설문을 </a:t>
+            </a:r>
+            <a:r>
+              <a:rPr lang="ko-KR" altLang="en-US" sz="1600" dirty="0" err="1"/>
+              <a:t>하느냐에</a:t>
+            </a:r>
+            <a:r>
+              <a:rPr lang="ko-KR" altLang="en-US" sz="1600" dirty="0"/>
+              <a:t> 따라 큰 차이를 나게 한다</a:t>
+            </a:r>
+            <a:r>
+              <a:rPr lang="en-US" altLang="ko-KR" sz="1600" dirty="0"/>
+              <a:t>.</a:t>
+            </a:r>
+          </a:p>
+        </p:txBody>
+      </p:sp>
+    </p:spTree>
+    <p:extLst>
+      <p:ext uri="{BB962C8B-B14F-4D97-AF65-F5344CB8AC3E}">
+        <p14:creationId xmlns:p14="http://schemas.microsoft.com/office/powerpoint/2010/main" val="3599583269"/>
+      </p:ext>
+    </p:extLst>
+  </p:cSld>
+  <p:clrMapOvr>
+    <a:masterClrMapping/>
+  </p:clrMapOvr>
+</p:sld>
+</file>
+
+<file path=ppt/slides/slide11.xml><?xml version="1.0" encoding="utf-8"?>
+<p:sld xmlns:a="http://schemas.openxmlformats.org/drawingml/2006/main" xmlns:r="http://schemas.openxmlformats.org/officeDocument/2006/relationships" xmlns:p="http://schemas.openxmlformats.org/presentationml/2006/main">
+  <p:cSld>
+    <p:spTree>
+      <p:nvGrpSpPr>
+        <p:cNvPr id="1" name="">
+          <a:extLst>
+            <a:ext uri="{FF2B5EF4-FFF2-40B4-BE49-F238E27FC236}">
               <a16:creationId xmlns:a16="http://schemas.microsoft.com/office/drawing/2014/main" id="{36EAD309-5C30-3682-A75C-15FFDC4D2E46}"/>
             </a:ext>
           </a:extLst>
@@ -7326,7 +7782,7 @@
           <a:p>
             <a:fld id="{109C872D-39A9-4065-8BF3-6A613116E2A1}" type="slidenum">
               <a:rPr lang="ko-KR" altLang="en-US" smtClean="0"/>
-              <a:t>10</a:t>
+              <a:t>11</a:t>
             </a:fld>
             <a:endParaRPr lang="ko-KR" altLang="en-US"/>
           </a:p>
@@ -7347,7 +7803,7 @@
         <p:spPr>
           <a:xfrm>
             <a:off x="288790" y="958844"/>
-            <a:ext cx="11250267" cy="3738011"/>
+            <a:ext cx="11250267" cy="4476675"/>
           </a:xfrm>
           <a:prstGeom prst="rect">
             <a:avLst/>
@@ -7394,19 +7850,7 @@
             </a:r>
             <a:r>
               <a:rPr lang="ko-KR" altLang="en-US" sz="1600" spc="-50" dirty="0"/>
-              <a:t>현시선호를 중시하는 사람의 시각에서 보면 별로 신빙성이 없는 접근일 수 </a:t>
-            </a:r>
-            <a:r>
-              <a:rPr lang="ko-KR" altLang="en-US" sz="1600" spc="-50"/>
-              <a:t>밖에 </a:t>
-            </a:r>
-            <a:r>
-              <a:rPr lang="ko-KR" altLang="en-US" sz="1600" spc="-50" dirty="0"/>
-              <a:t>없</a:t>
-            </a:r>
-            <a:r>
-              <a:rPr lang="ko-KR" altLang="en-US" sz="1600" spc="-50"/>
-              <a:t>다</a:t>
+              <a:t>현시선호를 중시하는 사람의 시각에서 보면 별로 신빙성이 없는 접근일 수 밖에 없다</a:t>
             </a:r>
             <a:r>
               <a:rPr lang="en-US" altLang="ko-KR" sz="1600" spc="-50" dirty="0"/>
@@ -7437,6 +7881,26 @@
               <a:rPr lang="en-US" altLang="ko-KR" sz="1600" spc="-50" dirty="0"/>
               <a:t>.</a:t>
             </a:r>
+          </a:p>
+          <a:p>
+            <a:pPr marL="835025" lvl="1" indent="-285750">
+              <a:lnSpc>
+                <a:spcPct val="150000"/>
+              </a:lnSpc>
+              <a:buFont typeface="Wingdings" panose="05000000000000000000" pitchFamily="2" charset="2"/>
+              <a:buChar char="ü"/>
+            </a:pPr>
+            <a:endParaRPr lang="en-US" altLang="ko-KR" sz="1600" spc="-50" dirty="0"/>
+          </a:p>
+          <a:p>
+            <a:pPr marL="835025" lvl="1" indent="-285750">
+              <a:lnSpc>
+                <a:spcPct val="150000"/>
+              </a:lnSpc>
+              <a:buFont typeface="Wingdings" panose="05000000000000000000" pitchFamily="2" charset="2"/>
+              <a:buChar char="ü"/>
+            </a:pPr>
+            <a:endParaRPr lang="en-US" altLang="ko-KR" sz="1600" spc="-50" dirty="0"/>
           </a:p>
           <a:p>
             <a:pPr marL="377825" indent="-285750">
@@ -7519,462 +7983,6 @@
     <p:extLst>
       <p:ext uri="{BB962C8B-B14F-4D97-AF65-F5344CB8AC3E}">
         <p14:creationId xmlns:p14="http://schemas.microsoft.com/office/powerpoint/2010/main" val="87824142"/>
-      </p:ext>
-    </p:extLst>
-  </p:cSld>
-  <p:clrMapOvr>
-    <a:masterClrMapping/>
-  </p:clrMapOvr>
-</p:sld>
-</file>
-
-<file path=ppt/slides/slide11.xml><?xml version="1.0" encoding="utf-8"?>
-<p:sld xmlns:a="http://schemas.openxmlformats.org/drawingml/2006/main" xmlns:r="http://schemas.openxmlformats.org/officeDocument/2006/relationships" xmlns:p="http://schemas.openxmlformats.org/presentationml/2006/main">
-  <p:cSld>
-    <p:spTree>
-      <p:nvGrpSpPr>
-        <p:cNvPr id="1" name="">
-          <a:extLst>
-            <a:ext uri="{FF2B5EF4-FFF2-40B4-BE49-F238E27FC236}">
-              <a16:creationId xmlns:a16="http://schemas.microsoft.com/office/drawing/2014/main" id="{43125B29-611F-999C-1E55-354A8BEFE732}"/>
-            </a:ext>
-          </a:extLst>
-        </p:cNvPr>
-        <p:cNvGrpSpPr/>
-        <p:nvPr/>
-      </p:nvGrpSpPr>
-      <p:grpSpPr>
-        <a:xfrm>
-          <a:off x="0" y="0"/>
-          <a:ext cx="0" cy="0"/>
-          <a:chOff x="0" y="0"/>
-          <a:chExt cx="0" cy="0"/>
-        </a:xfrm>
-      </p:grpSpPr>
-      <p:sp>
-        <p:nvSpPr>
-          <p:cNvPr id="2" name="제목 1">
-            <a:extLst>
-              <a:ext uri="{FF2B5EF4-FFF2-40B4-BE49-F238E27FC236}">
-                <a16:creationId xmlns:a16="http://schemas.microsoft.com/office/drawing/2014/main" id="{2DE4F974-FAB6-D464-06A6-F925D2123293}"/>
-              </a:ext>
-            </a:extLst>
-          </p:cNvPr>
-          <p:cNvSpPr>
-            <a:spLocks noGrp="1"/>
-          </p:cNvSpPr>
-          <p:nvPr>
-            <p:ph type="title"/>
-          </p:nvPr>
-        </p:nvSpPr>
-        <p:spPr/>
-        <p:txBody>
-          <a:bodyPr/>
-          <a:lstStyle/>
-          <a:p>
-            <a:r>
-              <a:rPr lang="ko-KR" altLang="en-US" dirty="0"/>
-              <a:t>조건부평가법을 둘러싼 논쟁</a:t>
-            </a:r>
-          </a:p>
-        </p:txBody>
-      </p:sp>
-      <p:sp>
-        <p:nvSpPr>
-          <p:cNvPr id="4" name="슬라이드 번호 개체 틀 3">
-            <a:extLst>
-              <a:ext uri="{FF2B5EF4-FFF2-40B4-BE49-F238E27FC236}">
-                <a16:creationId xmlns:a16="http://schemas.microsoft.com/office/drawing/2014/main" id="{C19BE421-0D30-5FDC-93EE-E737A51CBE1D}"/>
-              </a:ext>
-            </a:extLst>
-          </p:cNvPr>
-          <p:cNvSpPr>
-            <a:spLocks noGrp="1"/>
-          </p:cNvSpPr>
-          <p:nvPr>
-            <p:ph type="sldNum" sz="quarter" idx="12"/>
-          </p:nvPr>
-        </p:nvSpPr>
-        <p:spPr/>
-        <p:txBody>
-          <a:bodyPr/>
-          <a:lstStyle/>
-          <a:p>
-            <a:fld id="{109C872D-39A9-4065-8BF3-6A613116E2A1}" type="slidenum">
-              <a:rPr lang="ko-KR" altLang="en-US" smtClean="0"/>
-              <a:t>11</a:t>
-            </a:fld>
-            <a:endParaRPr lang="ko-KR" altLang="en-US"/>
-          </a:p>
-        </p:txBody>
-      </p:sp>
-      <p:sp>
-        <p:nvSpPr>
-          <p:cNvPr id="5" name="TextBox 4">
-            <a:extLst>
-              <a:ext uri="{FF2B5EF4-FFF2-40B4-BE49-F238E27FC236}">
-                <a16:creationId xmlns:a16="http://schemas.microsoft.com/office/drawing/2014/main" id="{5EDBDAE9-01AB-96C8-99F2-1DA74C052C6C}"/>
-              </a:ext>
-            </a:extLst>
-          </p:cNvPr>
-          <p:cNvSpPr txBox="1"/>
-          <p:nvPr/>
-        </p:nvSpPr>
-        <p:spPr>
-          <a:xfrm>
-            <a:off x="288790" y="958844"/>
-            <a:ext cx="11250267" cy="5215338"/>
-          </a:xfrm>
-          <a:prstGeom prst="rect">
-            <a:avLst/>
-          </a:prstGeom>
-          <a:noFill/>
-        </p:spPr>
-        <p:txBody>
-          <a:bodyPr wrap="square" rtlCol="0" anchor="t">
-            <a:spAutoFit/>
-          </a:bodyPr>
-          <a:lstStyle/>
-          <a:p>
-            <a:pPr marL="377825" indent="-285750">
-              <a:lnSpc>
-                <a:spcPct val="150000"/>
-              </a:lnSpc>
-              <a:buFont typeface="Arial" panose="020B0604020202020204" pitchFamily="34" charset="0"/>
-              <a:buChar char="•"/>
-            </a:pPr>
-            <a:r>
-              <a:rPr lang="ko-KR" altLang="en-US" sz="1600" spc="-50" dirty="0"/>
-              <a:t>그러나 조건부평가법이 설문조사 방법이 갖는 일반적인 문제에서 자유롭지 못한 것도 사실이다</a:t>
-            </a:r>
-            <a:r>
-              <a:rPr lang="en-US" altLang="ko-KR" sz="1600" spc="-50" dirty="0"/>
-              <a:t>.</a:t>
-            </a:r>
-          </a:p>
-          <a:p>
-            <a:pPr marL="835025" lvl="1" indent="-285750">
-              <a:lnSpc>
-                <a:spcPct val="150000"/>
-              </a:lnSpc>
-              <a:buFont typeface="Wingdings" panose="05000000000000000000" pitchFamily="2" charset="2"/>
-              <a:buChar char="ü"/>
-            </a:pPr>
-            <a:r>
-              <a:rPr lang="ko-KR" altLang="en-US" sz="1600" spc="-50" dirty="0"/>
-              <a:t>설문조사의 경우</a:t>
-            </a:r>
-            <a:r>
-              <a:rPr lang="en-US" altLang="ko-KR" sz="1600" spc="-50" dirty="0"/>
-              <a:t>, </a:t>
-            </a:r>
-            <a:r>
-              <a:rPr lang="ko-KR" altLang="en-US" sz="1600" spc="-50" dirty="0"/>
-              <a:t>질문의 표현과 순서를 조금만 바꾸어도 응답의 내용이 크게 달라지는 일이 발생하는데</a:t>
-            </a:r>
-            <a:r>
-              <a:rPr lang="en-US" altLang="ko-KR" sz="1600" spc="-50" dirty="0"/>
-              <a:t>, </a:t>
-            </a:r>
-            <a:r>
-              <a:rPr lang="ko-KR" altLang="en-US" sz="1600" spc="-50" dirty="0"/>
-              <a:t>이를 응답효과라고 부르며</a:t>
-            </a:r>
-            <a:r>
-              <a:rPr lang="en-US" altLang="ko-KR" sz="1600" spc="-50" dirty="0"/>
-              <a:t> </a:t>
-            </a:r>
-            <a:r>
-              <a:rPr lang="ko-KR" altLang="en-US" sz="1600" spc="-50" dirty="0"/>
-              <a:t>설문조사 결과의 신빙성을 떨어뜨리는 역할을 한다</a:t>
-            </a:r>
-            <a:r>
-              <a:rPr lang="en-US" altLang="ko-KR" sz="1600" spc="-50" dirty="0"/>
-              <a:t>.</a:t>
-            </a:r>
-          </a:p>
-          <a:p>
-            <a:pPr marL="835025" lvl="1" indent="-285750">
-              <a:lnSpc>
-                <a:spcPct val="150000"/>
-              </a:lnSpc>
-              <a:buFont typeface="Wingdings" panose="05000000000000000000" pitchFamily="2" charset="2"/>
-              <a:buChar char="ü"/>
-            </a:pPr>
-            <a:r>
-              <a:rPr lang="ko-KR" altLang="en-US" sz="1600" spc="-50" dirty="0"/>
-              <a:t>또한 평소 환경에 대해 별 생각이 없던 사람에게 환경의 가치를 묻고</a:t>
-            </a:r>
-            <a:r>
-              <a:rPr lang="en-US" altLang="ko-KR" sz="1600" spc="-50" dirty="0"/>
-              <a:t>, </a:t>
-            </a:r>
-            <a:r>
-              <a:rPr lang="ko-KR" altLang="en-US" sz="1600" spc="-50" dirty="0"/>
-              <a:t>대답한 것이 믿을 만한지에 대해서도 의문이다</a:t>
-            </a:r>
-            <a:r>
-              <a:rPr lang="en-US" altLang="ko-KR" sz="1600" spc="-50" dirty="0"/>
-              <a:t>.</a:t>
-            </a:r>
-          </a:p>
-          <a:p>
-            <a:pPr marL="377825" indent="-285750">
-              <a:lnSpc>
-                <a:spcPct val="150000"/>
-              </a:lnSpc>
-              <a:buFont typeface="Arial" panose="020B0604020202020204" pitchFamily="34" charset="0"/>
-              <a:buChar char="•"/>
-            </a:pPr>
-            <a:r>
-              <a:rPr lang="ko-KR" altLang="en-US" sz="1600" spc="-50" dirty="0"/>
-              <a:t>설문조사가 갖는 문제점 뿐만 아니라 경제이론의 관점에서도 조건부평가법이 부적절하다고 평가를 하기도 한다</a:t>
-            </a:r>
-            <a:r>
-              <a:rPr lang="en-US" altLang="ko-KR" sz="1600" spc="-50" dirty="0"/>
-              <a:t>.</a:t>
-            </a:r>
-          </a:p>
-          <a:p>
-            <a:pPr marL="835025" lvl="1" indent="-285750">
-              <a:lnSpc>
-                <a:spcPct val="150000"/>
-              </a:lnSpc>
-              <a:buFont typeface="Wingdings" panose="05000000000000000000" pitchFamily="2" charset="2"/>
-              <a:buChar char="ü"/>
-            </a:pPr>
-            <a:r>
-              <a:rPr lang="ko-KR" altLang="en-US" sz="1600" dirty="0"/>
-              <a:t>다이아몬드</a:t>
-            </a:r>
-            <a:r>
-              <a:rPr lang="en-US" altLang="ko-KR" sz="1600" dirty="0"/>
-              <a:t>-</a:t>
-            </a:r>
-            <a:r>
-              <a:rPr lang="ko-KR" altLang="en-US" sz="1600" dirty="0" err="1"/>
-              <a:t>하우즈먼은</a:t>
-            </a:r>
-            <a:r>
-              <a:rPr lang="ko-KR" altLang="en-US" sz="1600" dirty="0"/>
-              <a:t> 조건부평가법이 환경의 가치를 과대평가하는 결과를 가져올 수 있다고 얘기한다</a:t>
-            </a:r>
-            <a:r>
-              <a:rPr lang="en-US" altLang="ko-KR" sz="1600" dirty="0"/>
-              <a:t>.</a:t>
-            </a:r>
-          </a:p>
-          <a:p>
-            <a:pPr marL="1292225" lvl="2" indent="-285750">
-              <a:lnSpc>
-                <a:spcPct val="150000"/>
-              </a:lnSpc>
-              <a:buFont typeface="Wingdings" panose="05000000000000000000" pitchFamily="2" charset="2"/>
-              <a:buChar char="Ø"/>
-            </a:pPr>
-            <a:r>
-              <a:rPr lang="ko-KR" altLang="en-US" sz="1600" dirty="0"/>
-              <a:t>설문 응답자들은 자기 자신뿐 아니라 남들이 얻을 환경 혜택까지 감안하여 대답할 가능성이 있다는 것이다</a:t>
-            </a:r>
-            <a:r>
-              <a:rPr lang="en-US" altLang="ko-KR" sz="1600" dirty="0"/>
-              <a:t>.</a:t>
-            </a:r>
-          </a:p>
-          <a:p>
-            <a:pPr marL="835025" lvl="1" indent="-285750">
-              <a:lnSpc>
-                <a:spcPct val="150000"/>
-              </a:lnSpc>
-              <a:buFont typeface="Wingdings" panose="05000000000000000000" pitchFamily="2" charset="2"/>
-              <a:buChar char="ü"/>
-            </a:pPr>
-            <a:r>
-              <a:rPr lang="ko-KR" altLang="en-US" sz="1600" dirty="0"/>
-              <a:t>행태경제학자들은 어떤 물건을 보유하고 </a:t>
-            </a:r>
-            <a:r>
-              <a:rPr lang="ko-KR" altLang="en-US" sz="1600" dirty="0" err="1"/>
-              <a:t>있는지의</a:t>
-            </a:r>
-            <a:r>
-              <a:rPr lang="ko-KR" altLang="en-US" sz="1600" dirty="0"/>
-              <a:t> 여부가 그것의 가치 평가에 영향을 준다고 주장한다</a:t>
-            </a:r>
-            <a:r>
-              <a:rPr lang="en-US" altLang="ko-KR" sz="1600" dirty="0"/>
-              <a:t>.</a:t>
-            </a:r>
-          </a:p>
-          <a:p>
-            <a:pPr marL="1292225" lvl="2" indent="-285750">
-              <a:lnSpc>
-                <a:spcPct val="150000"/>
-              </a:lnSpc>
-              <a:buFont typeface="Wingdings" panose="05000000000000000000" pitchFamily="2" charset="2"/>
-              <a:buChar char="Ø"/>
-            </a:pPr>
-            <a:r>
-              <a:rPr lang="ko-KR" altLang="en-US" sz="1600" dirty="0"/>
-              <a:t>어떤 재화의 소유자가 남에게 넘기려면 최소한으로 받을 수 있는 금액이 </a:t>
-            </a:r>
-            <a:r>
-              <a:rPr lang="en-US" altLang="ko-KR" sz="1600" dirty="0"/>
-              <a:t>‘</a:t>
-            </a:r>
-            <a:r>
-              <a:rPr lang="ko-KR" altLang="en-US" sz="1600" dirty="0"/>
-              <a:t>수용의사가 있는 금액</a:t>
-            </a:r>
-            <a:r>
-              <a:rPr lang="en-US" altLang="ko-KR" sz="1600" dirty="0"/>
-              <a:t>’ (Willingness To Accept, WTA)</a:t>
-            </a:r>
-            <a:r>
-              <a:rPr lang="ko-KR" altLang="en-US" sz="1600" dirty="0"/>
-              <a:t>이고</a:t>
-            </a:r>
-            <a:r>
-              <a:rPr lang="en-US" altLang="ko-KR" sz="1600" dirty="0"/>
-              <a:t>, </a:t>
-            </a:r>
-            <a:r>
-              <a:rPr lang="ko-KR" altLang="en-US" sz="1600" dirty="0"/>
-              <a:t>또 다른 어떤 사람이 그것을 얻기 위해 지불할 금액을 </a:t>
-            </a:r>
-            <a:r>
-              <a:rPr lang="en-US" altLang="ko-KR" sz="1600" dirty="0"/>
-              <a:t>‘</a:t>
-            </a:r>
-            <a:r>
-              <a:rPr lang="ko-KR" altLang="en-US" sz="1600" dirty="0"/>
-              <a:t>지불의사가 있는 금액</a:t>
-            </a:r>
-            <a:r>
-              <a:rPr lang="en-US" altLang="ko-KR" sz="1600" dirty="0"/>
-              <a:t>’ (Willingness To Pay, WTP)</a:t>
-            </a:r>
-            <a:r>
-              <a:rPr lang="ko-KR" altLang="en-US" sz="1600" dirty="0"/>
-              <a:t>이다</a:t>
-            </a:r>
-            <a:r>
-              <a:rPr lang="en-US" altLang="ko-KR" sz="1600" dirty="0"/>
-              <a:t>.</a:t>
-            </a:r>
-          </a:p>
-          <a:p>
-            <a:pPr marL="1292225" lvl="2" indent="-285750">
-              <a:lnSpc>
-                <a:spcPct val="150000"/>
-              </a:lnSpc>
-              <a:buFont typeface="Wingdings" panose="05000000000000000000" pitchFamily="2" charset="2"/>
-              <a:buChar char="Ø"/>
-            </a:pPr>
-            <a:r>
-              <a:rPr lang="ko-KR" altLang="en-US" sz="1600" dirty="0"/>
-              <a:t>일반적으로 </a:t>
-            </a:r>
-            <a:r>
-              <a:rPr lang="en-US" altLang="ko-KR" sz="1600" dirty="0"/>
-              <a:t>‘</a:t>
-            </a:r>
-            <a:r>
-              <a:rPr lang="ko-KR" altLang="en-US" sz="1600" dirty="0"/>
-              <a:t>수용의사 금액</a:t>
-            </a:r>
-            <a:r>
-              <a:rPr lang="en-US" altLang="ko-KR" sz="1600" dirty="0"/>
-              <a:t>(WTA)’</a:t>
-            </a:r>
-            <a:r>
-              <a:rPr lang="ko-KR" altLang="en-US" sz="1600" dirty="0"/>
-              <a:t> </a:t>
-            </a:r>
-            <a:r>
-              <a:rPr lang="en-US" altLang="ko-KR" sz="1600" dirty="0"/>
-              <a:t>&gt;</a:t>
-            </a:r>
-            <a:r>
-              <a:rPr lang="ko-KR" altLang="en-US" sz="1600" dirty="0"/>
-              <a:t> </a:t>
-            </a:r>
-            <a:r>
-              <a:rPr lang="en-US" altLang="ko-KR" sz="1600" dirty="0"/>
-              <a:t>‘</a:t>
-            </a:r>
-            <a:r>
-              <a:rPr lang="ko-KR" altLang="en-US" sz="1600" dirty="0"/>
-              <a:t>지불의사 금액</a:t>
-            </a:r>
-            <a:r>
-              <a:rPr lang="en-US" altLang="ko-KR" sz="1600" dirty="0"/>
-              <a:t>(WTP)‘ </a:t>
-            </a:r>
-            <a:r>
-              <a:rPr lang="ko-KR" altLang="en-US" sz="1600" dirty="0"/>
-              <a:t>관계가 나타나는데</a:t>
-            </a:r>
-            <a:r>
-              <a:rPr lang="en-US" altLang="ko-KR" sz="1600" dirty="0"/>
-              <a:t>, </a:t>
-            </a:r>
-            <a:r>
-              <a:rPr lang="ko-KR" altLang="en-US" sz="1600" dirty="0"/>
-              <a:t>행태경제학자에 따르면 부존효과 때문이 이런 결과가 나타난다고 한다</a:t>
-            </a:r>
-            <a:r>
-              <a:rPr lang="en-US" altLang="ko-KR" sz="1600" dirty="0"/>
-              <a:t>.</a:t>
-            </a:r>
-          </a:p>
-          <a:p>
-            <a:pPr marL="1292225" lvl="2" indent="-285750">
-              <a:lnSpc>
-                <a:spcPct val="150000"/>
-              </a:lnSpc>
-              <a:buFont typeface="Wingdings" panose="05000000000000000000" pitchFamily="2" charset="2"/>
-              <a:buChar char="Ø"/>
-            </a:pPr>
-            <a:r>
-              <a:rPr lang="ko-KR" altLang="en-US" sz="1600" dirty="0"/>
-              <a:t>이런 부존효과는 사람들에게 </a:t>
-            </a:r>
-            <a:r>
-              <a:rPr lang="en-US" altLang="ko-KR" sz="1600" dirty="0"/>
-              <a:t>WTA</a:t>
-            </a:r>
-            <a:r>
-              <a:rPr lang="ko-KR" altLang="en-US" sz="1600" dirty="0"/>
-              <a:t>와 </a:t>
-            </a:r>
-            <a:r>
-              <a:rPr lang="en-US" altLang="ko-KR" sz="1600" dirty="0"/>
-              <a:t>WTP </a:t>
-            </a:r>
-            <a:r>
-              <a:rPr lang="ko-KR" altLang="en-US" sz="1600" dirty="0"/>
-              <a:t>둘 중 어떤 방식으로 설문을 </a:t>
-            </a:r>
-            <a:r>
-              <a:rPr lang="ko-KR" altLang="en-US" sz="1600" dirty="0" err="1"/>
-              <a:t>하느냐에</a:t>
-            </a:r>
-            <a:r>
-              <a:rPr lang="ko-KR" altLang="en-US" sz="1600" dirty="0"/>
-              <a:t> 따라 큰 차이를 나게 한다</a:t>
-            </a:r>
-            <a:r>
-              <a:rPr lang="en-US" altLang="ko-KR" sz="1600" dirty="0"/>
-              <a:t>.</a:t>
-            </a:r>
-          </a:p>
-        </p:txBody>
-      </p:sp>
-    </p:spTree>
-    <p:extLst>
-      <p:ext uri="{BB962C8B-B14F-4D97-AF65-F5344CB8AC3E}">
-        <p14:creationId xmlns:p14="http://schemas.microsoft.com/office/powerpoint/2010/main" val="3599583269"/>
       </p:ext>
     </p:extLst>
   </p:cSld>
@@ -19090,14 +19098,6 @@
             <a:r>
               <a:rPr lang="ko-KR" altLang="en-US" sz="1600" spc="-50" dirty="0"/>
               <a:t>맑은 공기</a:t>
-            </a:r>
-            <a:r>
-              <a:rPr lang="en-US" altLang="ko-KR" sz="1600" spc="-50" dirty="0"/>
-              <a:t>, </a:t>
-            </a:r>
-            <a:r>
-              <a:rPr lang="ko-KR" altLang="en-US" sz="1600" spc="-50" dirty="0"/>
-              <a:t>물</a:t>
             </a:r>
             <a:r>
               <a:rPr lang="en-US" altLang="ko-KR" sz="1600" spc="-50" dirty="0"/>
@@ -21815,15 +21815,15 @@
             </a:r>
             <a:r>
               <a:rPr lang="ko-KR" altLang="en-US" sz="1600" spc="-50" dirty="0"/>
-              <a:t>그 관찰 </a:t>
-            </a:r>
-            <a:r>
-              <a:rPr lang="ko-KR" altLang="en-US" sz="1600" spc="-50" dirty="0" err="1"/>
-              <a:t>결과을</a:t>
+              <a:t>그 </a:t>
+            </a:r>
+            <a:r>
+              <a:rPr lang="ko-KR" altLang="en-US" sz="1600" spc="-50"/>
+              <a:t>관찰 결과를 </a:t>
             </a:r>
             <a:r>
               <a:rPr lang="ko-KR" altLang="en-US" sz="1600" spc="-50" dirty="0"/>
-              <a:t> 통해 상품에 부여한 가치를 알아낼 수 있다는 말이다</a:t>
+              <a:t>통해 상품에 부여한 가치를 알아낼 수 있다는 말이다</a:t>
             </a:r>
             <a:r>
               <a:rPr lang="en-US" altLang="ko-KR" sz="1600" spc="-50" dirty="0"/>

--- a/재정학/01_Lectures/재정학_Chapter_7.pptx
+++ b/재정학/01_Lectures/재정학_Chapter_7.pptx
@@ -258,7 +258,7 @@
           <a:p>
             <a:fld id="{4A5E00EF-AEA4-43E2-9451-8F9C59A39471}" type="datetimeFigureOut">
               <a:rPr lang="ko-KR" altLang="en-US" smtClean="0"/>
-              <a:t>2026-05-06</a:t>
+              <a:t>2026-05-07</a:t>
             </a:fld>
             <a:endParaRPr lang="ko-KR" altLang="en-US"/>
           </a:p>
@@ -680,7 +680,7 @@
           <a:p>
             <a:fld id="{CD32C56F-BD27-4999-9E6D-D4EACE3DA9F4}" type="datetime1">
               <a:rPr lang="ko-KR" altLang="en-US" smtClean="0"/>
-              <a:t>2026-05-06</a:t>
+              <a:t>2026-05-07</a:t>
             </a:fld>
             <a:endParaRPr lang="ko-KR" altLang="en-US"/>
           </a:p>
@@ -894,7 +894,7 @@
           <a:p>
             <a:fld id="{8EF4A19C-72C8-45CA-8E3F-68A7FA345D6C}" type="datetime1">
               <a:rPr lang="ko-KR" altLang="en-US" smtClean="0"/>
-              <a:t>2026-05-06</a:t>
+              <a:t>2026-05-07</a:t>
             </a:fld>
             <a:endParaRPr lang="ko-KR" altLang="en-US"/>
           </a:p>
@@ -1118,7 +1118,7 @@
           <a:p>
             <a:fld id="{56A175B2-010B-4341-954C-5F8F5C70B124}" type="datetime1">
               <a:rPr lang="ko-KR" altLang="en-US" smtClean="0"/>
-              <a:t>2026-05-06</a:t>
+              <a:t>2026-05-07</a:t>
             </a:fld>
             <a:endParaRPr lang="ko-KR" altLang="en-US"/>
           </a:p>
@@ -1332,7 +1332,7 @@
           <a:p>
             <a:fld id="{16B83F9E-22C9-45CA-9E85-070F1D3EF530}" type="datetime1">
               <a:rPr lang="ko-KR" altLang="en-US" smtClean="0"/>
-              <a:t>2026-05-06</a:t>
+              <a:t>2026-05-07</a:t>
             </a:fld>
             <a:endParaRPr lang="ko-KR" altLang="en-US"/>
           </a:p>
@@ -1623,7 +1623,7 @@
           <a:p>
             <a:fld id="{03278F45-FB3C-4C4D-B89A-7BC3F5F229F6}" type="datetime1">
               <a:rPr lang="ko-KR" altLang="en-US" smtClean="0"/>
-              <a:t>2026-05-06</a:t>
+              <a:t>2026-05-07</a:t>
             </a:fld>
             <a:endParaRPr lang="ko-KR" altLang="en-US"/>
           </a:p>
@@ -2016,7 +2016,7 @@
           <a:p>
             <a:fld id="{38FDAC3C-35A6-415C-9F03-738A6AC328B1}" type="datetime1">
               <a:rPr lang="ko-KR" altLang="en-US" smtClean="0"/>
-              <a:t>2026-05-06</a:t>
+              <a:t>2026-05-07</a:t>
             </a:fld>
             <a:endParaRPr lang="ko-KR" altLang="en-US"/>
           </a:p>
@@ -3610,7 +3610,7 @@
           <a:p>
             <a:fld id="{507A0DF1-AEE6-4B0D-89D2-351E7B3EF65C}" type="datetime1">
               <a:rPr lang="ko-KR" altLang="en-US" smtClean="0"/>
-              <a:t>2026-05-06</a:t>
+              <a:t>2026-05-07</a:t>
             </a:fld>
             <a:endParaRPr lang="ko-KR" altLang="en-US"/>
           </a:p>
@@ -4038,7 +4038,7 @@
           <a:p>
             <a:fld id="{CA93B8C9-630F-4D57-944D-04FD37CECCD3}" type="datetime1">
               <a:rPr lang="ko-KR" altLang="en-US" smtClean="0"/>
-              <a:t>2026-05-06</a:t>
+              <a:t>2026-05-07</a:t>
             </a:fld>
             <a:endParaRPr lang="ko-KR" altLang="en-US"/>
           </a:p>
@@ -4195,7 +4195,7 @@
           <a:p>
             <a:fld id="{E986165A-AC43-4902-9541-874ECD310BA3}" type="datetime1">
               <a:rPr lang="ko-KR" altLang="en-US" smtClean="0"/>
-              <a:t>2026-05-06</a:t>
+              <a:t>2026-05-07</a:t>
             </a:fld>
             <a:endParaRPr lang="ko-KR" altLang="en-US"/>
           </a:p>
@@ -4522,7 +4522,7 @@
           <a:p>
             <a:fld id="{47E6EE6D-2B0E-43A9-87A2-7354CDB998F4}" type="datetime1">
               <a:rPr lang="ko-KR" altLang="en-US" smtClean="0"/>
-              <a:t>2026-05-06</a:t>
+              <a:t>2026-05-07</a:t>
             </a:fld>
             <a:endParaRPr lang="ko-KR" altLang="en-US"/>
           </a:p>
@@ -4826,7 +4826,7 @@
           <a:p>
             <a:fld id="{5CC5944E-0BC8-4FAA-9F94-6B4B05834E10}" type="datetime1">
               <a:rPr lang="ko-KR" altLang="en-US" smtClean="0"/>
-              <a:t>2026-05-06</a:t>
+              <a:t>2026-05-07</a:t>
             </a:fld>
             <a:endParaRPr lang="ko-KR" altLang="en-US"/>
           </a:p>
@@ -11906,7 +11906,7 @@
             </a:pPr>
             <a:r>
               <a:rPr lang="ko-KR" altLang="en-US" sz="1600" dirty="0"/>
-              <a:t>환경정책과 관련된 비용은 정부의 예산</a:t>
+              <a:t>환경정책과 관련된 전체 비용은 정부의 예산</a:t>
             </a:r>
             <a:r>
               <a:rPr lang="en-US" altLang="ko-KR" sz="1600" dirty="0"/>
@@ -11939,7 +11939,7 @@
             </a:pPr>
             <a:r>
               <a:rPr lang="ko-KR" altLang="en-US" sz="1600" dirty="0"/>
-              <a:t>이런 비용들이 현실에서는 소득계층별로 어떻게 분배되고 있는지 알아내는 것은 대단히 어렵다</a:t>
+              <a:t>이렇게 파악된 전체 비용이 현실에서는 소득계층별로 어떻게 분배되고 있는지 알아내는 것은 대단히 어렵다</a:t>
             </a:r>
             <a:r>
               <a:rPr lang="en-US" altLang="ko-KR" sz="1600" dirty="0"/>
@@ -12373,7 +12373,7 @@
             </a:r>
             <a:r>
               <a:rPr lang="ko-KR" altLang="en-US" sz="1600" dirty="0"/>
-              <a:t>이로 인해  특정 계층의 사람들에게 비용을 발생시킬 수 있다</a:t>
+              <a:t>이로 인해 특정 계층의 사람들에게 비용을 발생시킬 수 있다</a:t>
             </a:r>
             <a:r>
               <a:rPr lang="en-US" altLang="ko-KR" sz="1600" dirty="0"/>

--- a/재정학/01_Lectures/재정학_Chapter_7.pptx
+++ b/재정학/01_Lectures/재정학_Chapter_7.pptx
@@ -258,7 +258,7 @@
           <a:p>
             <a:fld id="{4A5E00EF-AEA4-43E2-9451-8F9C59A39471}" type="datetimeFigureOut">
               <a:rPr lang="ko-KR" altLang="en-US" smtClean="0"/>
-              <a:t>2026-05-07</a:t>
+              <a:t>2026-05-08</a:t>
             </a:fld>
             <a:endParaRPr lang="ko-KR" altLang="en-US"/>
           </a:p>
@@ -680,7 +680,7 @@
           <a:p>
             <a:fld id="{CD32C56F-BD27-4999-9E6D-D4EACE3DA9F4}" type="datetime1">
               <a:rPr lang="ko-KR" altLang="en-US" smtClean="0"/>
-              <a:t>2026-05-07</a:t>
+              <a:t>2026-05-08</a:t>
             </a:fld>
             <a:endParaRPr lang="ko-KR" altLang="en-US"/>
           </a:p>
@@ -894,7 +894,7 @@
           <a:p>
             <a:fld id="{8EF4A19C-72C8-45CA-8E3F-68A7FA345D6C}" type="datetime1">
               <a:rPr lang="ko-KR" altLang="en-US" smtClean="0"/>
-              <a:t>2026-05-07</a:t>
+              <a:t>2026-05-08</a:t>
             </a:fld>
             <a:endParaRPr lang="ko-KR" altLang="en-US"/>
           </a:p>
@@ -1118,7 +1118,7 @@
           <a:p>
             <a:fld id="{56A175B2-010B-4341-954C-5F8F5C70B124}" type="datetime1">
               <a:rPr lang="ko-KR" altLang="en-US" smtClean="0"/>
-              <a:t>2026-05-07</a:t>
+              <a:t>2026-05-08</a:t>
             </a:fld>
             <a:endParaRPr lang="ko-KR" altLang="en-US"/>
           </a:p>
@@ -1332,7 +1332,7 @@
           <a:p>
             <a:fld id="{16B83F9E-22C9-45CA-9E85-070F1D3EF530}" type="datetime1">
               <a:rPr lang="ko-KR" altLang="en-US" smtClean="0"/>
-              <a:t>2026-05-07</a:t>
+              <a:t>2026-05-08</a:t>
             </a:fld>
             <a:endParaRPr lang="ko-KR" altLang="en-US"/>
           </a:p>
@@ -1623,7 +1623,7 @@
           <a:p>
             <a:fld id="{03278F45-FB3C-4C4D-B89A-7BC3F5F229F6}" type="datetime1">
               <a:rPr lang="ko-KR" altLang="en-US" smtClean="0"/>
-              <a:t>2026-05-07</a:t>
+              <a:t>2026-05-08</a:t>
             </a:fld>
             <a:endParaRPr lang="ko-KR" altLang="en-US"/>
           </a:p>
@@ -2016,7 +2016,7 @@
           <a:p>
             <a:fld id="{38FDAC3C-35A6-415C-9F03-738A6AC328B1}" type="datetime1">
               <a:rPr lang="ko-KR" altLang="en-US" smtClean="0"/>
-              <a:t>2026-05-07</a:t>
+              <a:t>2026-05-08</a:t>
             </a:fld>
             <a:endParaRPr lang="ko-KR" altLang="en-US"/>
           </a:p>
@@ -3610,7 +3610,7 @@
           <a:p>
             <a:fld id="{507A0DF1-AEE6-4B0D-89D2-351E7B3EF65C}" type="datetime1">
               <a:rPr lang="ko-KR" altLang="en-US" smtClean="0"/>
-              <a:t>2026-05-07</a:t>
+              <a:t>2026-05-08</a:t>
             </a:fld>
             <a:endParaRPr lang="ko-KR" altLang="en-US"/>
           </a:p>
@@ -4038,7 +4038,7 @@
           <a:p>
             <a:fld id="{CA93B8C9-630F-4D57-944D-04FD37CECCD3}" type="datetime1">
               <a:rPr lang="ko-KR" altLang="en-US" smtClean="0"/>
-              <a:t>2026-05-07</a:t>
+              <a:t>2026-05-08</a:t>
             </a:fld>
             <a:endParaRPr lang="ko-KR" altLang="en-US"/>
           </a:p>
@@ -4195,7 +4195,7 @@
           <a:p>
             <a:fld id="{E986165A-AC43-4902-9541-874ECD310BA3}" type="datetime1">
               <a:rPr lang="ko-KR" altLang="en-US" smtClean="0"/>
-              <a:t>2026-05-07</a:t>
+              <a:t>2026-05-08</a:t>
             </a:fld>
             <a:endParaRPr lang="ko-KR" altLang="en-US"/>
           </a:p>
@@ -4522,7 +4522,7 @@
           <a:p>
             <a:fld id="{47E6EE6D-2B0E-43A9-87A2-7354CDB998F4}" type="datetime1">
               <a:rPr lang="ko-KR" altLang="en-US" smtClean="0"/>
-              <a:t>2026-05-07</a:t>
+              <a:t>2026-05-08</a:t>
             </a:fld>
             <a:endParaRPr lang="ko-KR" altLang="en-US"/>
           </a:p>
@@ -4826,7 +4826,7 @@
           <a:p>
             <a:fld id="{5CC5944E-0BC8-4FAA-9F94-6B4B05834E10}" type="datetime1">
               <a:rPr lang="ko-KR" altLang="en-US" smtClean="0"/>
-              <a:t>2026-05-07</a:t>
+              <a:t>2026-05-08</a:t>
             </a:fld>
             <a:endParaRPr lang="ko-KR" altLang="en-US"/>
           </a:p>
@@ -15346,7 +15346,7 @@
             </a:pPr>
             <a:r>
               <a:rPr lang="ko-KR" altLang="en-US" sz="1600" dirty="0"/>
-              <a:t>오염유발 산업이 선전국을 떠나 환경규제가 비교적 느슨한 개발도상국으로 이전한 것과</a:t>
+              <a:t>오염유발 산업이 선진국을 떠나 환경규제가 비교적 느슨한 개발도상국으로 이전한 것과</a:t>
             </a:r>
             <a:r>
               <a:rPr lang="en-US" altLang="ko-KR" sz="1600" dirty="0"/>
@@ -15899,8 +15899,8 @@
               <a:t>와 </a:t>
             </a:r>
             <a:r>
-              <a:rPr lang="ko-KR" altLang="en-US" sz="1600" b="1" dirty="0" err="1"/>
-              <a:t>파립협정</a:t>
+              <a:rPr lang="ko-KR" altLang="en-US" sz="1600" b="1" dirty="0"/>
+              <a:t>파리협정</a:t>
             </a:r>
             <a:r>
               <a:rPr lang="ko-KR" altLang="en-US" sz="1600" dirty="0"/>
